--- a/templates/meta-ads-light.pptx
+++ b/templates/meta-ads-light.pptx
@@ -3287,7 +3287,7 @@
             <a:r>
               <a:rPr b="1" i="0" lang="en-US" sz="6000" u="none" cap="none" strike="noStrike">
                 <a:solidFill>
-                  <a:srgbClr val="F6AD55"/>
+                  <a:srgbClr val="0D1B2E"/>
                 </a:solidFill>
                 <a:latin typeface="Poppins"/>
                 <a:ea typeface="Poppins"/>
@@ -3311,7 +3311,7 @@
             <a:r>
               <a:rPr b="1" i="0" lang="en-US" sz="6000" u="none" cap="none" strike="noStrike">
                 <a:solidFill>
-                  <a:srgbClr val="F6AD55"/>
+                  <a:srgbClr val="0D1B2E"/>
                 </a:solidFill>
                 <a:latin typeface="Poppins"/>
                 <a:ea typeface="Poppins"/>
@@ -7482,7 +7482,7 @@
             <a:r>
               <a:rPr b="0" i="0" lang="en-US" sz="2800" u="none" cap="none" strike="noStrike">
                 <a:solidFill>
-                  <a:srgbClr val="C17D0A"/>
+                  <a:srgbClr val="0D1B2E"/>
                 </a:solidFill>
                 <a:latin typeface="Poppins SemiBold"/>
                 <a:ea typeface="Poppins SemiBold"/>
@@ -10485,7 +10485,7 @@
             <a:r>
               <a:rPr b="0" i="0" lang="en-US" sz="2800" u="none" cap="none" strike="noStrike">
                 <a:solidFill>
-                  <a:srgbClr val="C17D0A"/>
+                  <a:srgbClr val="0D1B2E"/>
                 </a:solidFill>
                 <a:latin typeface="Poppins SemiBold"/>
                 <a:ea typeface="Poppins SemiBold"/>
@@ -10576,7 +10576,7 @@
             <a:r>
               <a:rPr b="0" i="0" lang="en-US" sz="2800" u="none" cap="none" strike="noStrike">
                 <a:solidFill>
-                  <a:srgbClr val="C17D0A"/>
+                  <a:srgbClr val="0D1B2E"/>
                 </a:solidFill>
                 <a:latin typeface="Poppins SemiBold"/>
                 <a:ea typeface="Poppins SemiBold"/>
@@ -15320,7 +15320,7 @@
         <a:srgbClr val="4472C4"/>
       </a:accent1>
       <a:accent2>
-        <a:srgbClr val="ED7D31"/>
+        <a:srgbClr val="0D1B2E"/>
       </a:accent2>
       <a:accent3>
         <a:srgbClr val="A5A5A5"/>

--- a/templates/meta-ads-light.pptx
+++ b/templates/meta-ads-light.pptx
@@ -3322,6 +3322,93 @@
               <a:ea typeface="Poppins Medium"/>
               <a:cs typeface="Poppins Medium"/>
               <a:sym typeface="Poppins Medium"/>
+            </a:endParaRPr>
+          </a:p>
+        </p:txBody>
+      </p:sp>
+      <p:sp>
+        <p:nvSpPr>
+          <p:cNvPr id="24" name="Google Shape;24;p4"/>
+          <p:cNvSpPr/>
+          <p:nvPr/>
+        </p:nvSpPr>
+        <p:spPr>
+          <a:xfrm>
+            <a:off x="506630" y="5061635"/>
+            <a:ext cx="1745519" cy="331071"/>
+          </a:xfrm>
+          <a:prstGeom prst="roundRect">
+            <a:avLst>
+              <a:gd fmla="val 9840" name="adj"/>
+            </a:avLst>
+          </a:prstGeom>
+          <a:gradFill>
+            <a:gsLst>
+              <a:gs pos="0">
+                <a:schemeClr val="accent2"/>
+              </a:gs>
+              <a:gs pos="5000">
+                <a:schemeClr val="accent2"/>
+              </a:gs>
+              <a:gs pos="41000">
+                <a:schemeClr val="accent1"/>
+              </a:gs>
+              <a:gs pos="75000">
+                <a:schemeClr val="accent3"/>
+              </a:gs>
+              <a:gs pos="100000">
+                <a:schemeClr val="accent4"/>
+              </a:gs>
+            </a:gsLst>
+            <a:lin ang="0" scaled="0"/>
+          </a:gradFill>
+          <a:ln>
+            <a:noFill/>
+          </a:ln>
+        </p:spPr>
+        <p:txBody>
+          <a:bodyPr anchorCtr="0" anchor="ctr" bIns="45700" lIns="91425" spcFirstLastPara="1" rIns="91425" wrap="square" tIns="45700">
+            <a:noAutofit/>
+          </a:bodyPr>
+          <a:lstStyle/>
+          <a:p>
+            <a:pPr indent="0" lvl="0" marL="0" marR="0" rtl="0" algn="ctr">
+              <a:lnSpc>
+                <a:spcPct val="100000"/>
+              </a:lnSpc>
+              <a:spcBef>
+                <a:spcPts val="0"/>
+              </a:spcBef>
+              <a:spcAft>
+                <a:spcPts val="0"/>
+              </a:spcAft>
+              <a:buClr>
+                <a:srgbClr val="000000"/>
+              </a:buClr>
+              <a:buSzPts val="1200"/>
+              <a:buFont typeface="Arial"/>
+              <a:buNone/>
+            </a:pPr>
+            <a:r>
+              <a:rPr b="0" i="0" lang="en-US" sz="1200" u="none" cap="none" strike="noStrike">
+                <a:solidFill>
+                  <a:schemeClr val="lt1"/>
+                </a:solidFill>
+                <a:latin typeface="Poppins Medium"/>
+                <a:ea typeface="Poppins Medium"/>
+                <a:cs typeface="Poppins Medium"/>
+                <a:sym typeface="Poppins Medium"/>
+              </a:rPr>
+              <a:t>PRESENTED TO </a:t>
+            </a:r>
+            <a:endParaRPr b="0" i="0" sz="1400" u="none" cap="none" strike="noStrike">
+              <a:solidFill>
+                <a:srgbClr val="000000"/>
+              </a:solidFill>
+              <a:latin typeface="Arial"/>
+              <a:ea typeface="Arial"/>
+              <a:cs typeface="Arial"/>
+              <a:sym typeface="Arial"/>
             </a:endParaRPr>
           </a:p>
         </p:txBody>

--- a/templates/meta-ads-light.pptx
+++ b/templates/meta-ads-light.pptx
@@ -2192,6 +2192,57 @@
       </p:grpSpPr>
       <p:sp>
         <p:nvSpPr>
+          <p:cNvPr id="101" name="Light Theme Top Accent"/>
+          <p:cNvSpPr/>
+          <p:nvPr/>
+        </p:nvSpPr>
+        <p:spPr>
+          <a:xfrm>
+            <a:off x="0" y="0"/>
+            <a:ext cx="12192000" cy="76200"/>
+          </a:xfrm>
+          <a:prstGeom prst="rect">
+            <a:avLst/>
+          </a:prstGeom>
+          <a:gradFill>
+            <a:gsLst>
+              <a:gs pos="0">
+                <a:srgbClr val="016ED9">
+                  <a:alpha val="38000"/>
+                </a:srgbClr>
+              </a:gs>
+              <a:gs pos="35000">
+                <a:srgbClr val="FF3200">
+                  <a:alpha val="32000"/>
+                </a:srgbClr>
+              </a:gs>
+              <a:gs pos="70000">
+                <a:srgbClr val="FFB300">
+                  <a:alpha val="30000"/>
+                </a:srgbClr>
+              </a:gs>
+              <a:gs pos="100000">
+                <a:srgbClr val="DA32D0">
+                  <a:alpha val="35000"/>
+                </a:srgbClr>
+              </a:gs>
+            </a:gsLst>
+            <a:lin ang="0" scaled="0"/>
+          </a:gradFill>
+          <a:ln>
+            <a:noFill/>
+          </a:ln>
+        </p:spPr>
+        <p:txBody>
+          <a:bodyPr anchorCtr="0" anchor="ctr" bIns="0" lIns="0" rIns="0" tIns="0"/>
+          <a:lstStyle/>
+          <a:p>
+            <a:endParaRPr/>
+          </a:p>
+        </p:txBody>
+      </p:sp>
+      <p:sp>
+        <p:nvSpPr>
           <p:cNvPr id="13" name="Google Shape;13;p2"/>
           <p:cNvSpPr/>
           <p:nvPr/>
@@ -2204,9 +2255,20 @@
           <a:prstGeom prst="rect">
             <a:avLst/>
           </a:prstGeom>
-          <a:solidFill>
-            <a:schemeClr val="accent6"/>
-          </a:solidFill>
+          <a:gradFill>
+            <a:gsLst>
+              <a:gs pos="0">
+                <a:srgbClr val="FFFFFF"/>
+              </a:gs>
+              <a:gs pos="55000">
+                <a:srgbClr val="FDF8F3"/>
+              </a:gs>
+              <a:gs pos="100000">
+                <a:srgbClr val="F3EDE5"/>
+              </a:gs>
+            </a:gsLst>
+            <a:lin ang="5400000" scaled="0"/>
+          </a:gradFill>
           <a:ln>
             <a:noFill/>
           </a:ln>
@@ -2246,6 +2308,47 @@
               <a:cs typeface="Calibri"/>
               <a:sym typeface="Calibri"/>
             </a:endParaRPr>
+          </a:p>
+        </p:txBody>
+      </p:sp>
+      <p:sp>
+        <p:nvSpPr>
+          <p:cNvPr id="102" name="Light Theme Warm Glow"/>
+          <p:cNvSpPr/>
+          <p:nvPr/>
+        </p:nvSpPr>
+        <p:spPr>
+          <a:xfrm>
+            <a:off x="8382000" y="4572000"/>
+            <a:ext cx="3810000" cy="2286000"/>
+          </a:xfrm>
+          <a:prstGeom prst="ellipse">
+            <a:avLst/>
+          </a:prstGeom>
+          <a:gradFill rotWithShape="1">
+            <a:gsLst>
+              <a:gs pos="0">
+                <a:srgbClr val="FFB300">
+                  <a:alpha val="9000"/>
+                </a:srgbClr>
+              </a:gs>
+              <a:gs pos="100000">
+                <a:srgbClr val="FFB300">
+                  <a:alpha val="0"/>
+                </a:srgbClr>
+              </a:gs>
+            </a:gsLst>
+            <a:lin ang="5400000" scaled="0"/>
+          </a:gradFill>
+          <a:ln>
+            <a:noFill/>
+          </a:ln>
+        </p:spPr>
+        <p:txBody>
+          <a:bodyPr anchorCtr="0" anchor="ctr" bIns="0" lIns="0" rIns="0" tIns="0"/>
+          <a:lstStyle/>
+          <a:p>
+            <a:endParaRPr/>
           </a:p>
         </p:txBody>
       </p:sp>
@@ -3711,7 +3814,7 @@
             </a:solidFill>
             <a:ln w="9525">
               <a:solidFill>
-                <a:srgbClr val="F0D9B5"/>
+                <a:srgbClr val="E5DDD0"/>
               </a:solidFill>
             </a:ln>
             <a:effectLst>
@@ -4106,7 +4209,7 @@
             </a:solidFill>
             <a:ln w="9525">
               <a:solidFill>
-                <a:srgbClr val="F0D9B5"/>
+                <a:srgbClr val="E5DDD0"/>
               </a:solidFill>
             </a:ln>
             <a:effectLst>
@@ -4501,7 +4604,7 @@
             </a:solidFill>
             <a:ln w="9525">
               <a:solidFill>
-                <a:srgbClr val="F0D9B5"/>
+                <a:srgbClr val="E5DDD0"/>
               </a:solidFill>
             </a:ln>
             <a:effectLst>
@@ -4896,7 +4999,7 @@
             </a:solidFill>
             <a:ln w="9525">
               <a:solidFill>
-                <a:srgbClr val="F0D9B5"/>
+                <a:srgbClr val="E5DDD0"/>
               </a:solidFill>
             </a:ln>
             <a:effectLst>
@@ -5277,7 +5380,7 @@
           </a:solidFill>
           <a:ln w="9525">
             <a:solidFill>
-              <a:srgbClr val="F0D9B5"/>
+              <a:srgbClr val="E5DDD0"/>
             </a:solidFill>
           </a:ln>
           <a:effectLst>
@@ -5657,7 +5760,7 @@
           </a:solidFill>
           <a:ln w="9525">
             <a:solidFill>
-              <a:srgbClr val="F0D9B5"/>
+              <a:srgbClr val="E5DDD0"/>
             </a:solidFill>
           </a:ln>
           <a:effectLst>
@@ -6037,7 +6140,7 @@
           </a:solidFill>
           <a:ln w="9525">
             <a:solidFill>
-              <a:srgbClr val="F0D9B5"/>
+              <a:srgbClr val="E5DDD0"/>
             </a:solidFill>
           </a:ln>
           <a:effectLst>
@@ -6417,7 +6520,7 @@
           </a:solidFill>
           <a:ln w="9525">
             <a:solidFill>
-              <a:srgbClr val="F0D9B5"/>
+              <a:srgbClr val="E5DDD0"/>
             </a:solidFill>
           </a:ln>
           <a:effectLst>
@@ -7148,9 +7251,6 @@
                   <a:solidFill>
                     <a:srgbClr val="0D1B2E"/>
                   </a:solidFill>
-                  <a:highlight>
-                    <a:srgbClr val="22262B"/>
-                  </a:highlight>
                   <a:latin typeface="Open Sans"/>
                   <a:ea typeface="Open Sans"/>
                   <a:cs typeface="Open Sans"/>
@@ -7579,19 +7679,13 @@
           <a:gradFill>
             <a:gsLst>
               <a:gs pos="0">
-                <a:schemeClr val="accent2"/>
+                <a:srgbClr val="EDE6DA"/>
               </a:gs>
-              <a:gs pos="5000">
-                <a:schemeClr val="accent2"/>
-              </a:gs>
-              <a:gs pos="41000">
-                <a:schemeClr val="accent1"/>
-              </a:gs>
-              <a:gs pos="75000">
-                <a:schemeClr val="accent3"/>
+              <a:gs pos="50000">
+                <a:srgbClr val="D9CCB8"/>
               </a:gs>
               <a:gs pos="100000">
-                <a:schemeClr val="accent4"/>
+                <a:srgbClr val="EDE6DA"/>
               </a:gs>
             </a:gsLst>
             <a:lin ang="0" scaled="0"/>
@@ -7716,7 +7810,7 @@
                   <a:tcPr marT="0" marB="0" marR="63500" marL="63500" anchor="ctr">
                     <a:lnR cap="flat" cmpd="sng" w="19050">
                       <a:solidFill>
-                        <a:srgbClr val="F0D9B5"/>
+                        <a:srgbClr val="E5DDD0"/>
                       </a:solidFill>
                       <a:prstDash val="solid"/>
                       <a:round/>
@@ -7787,7 +7881,7 @@
                   <a:tcPr marT="0" marB="0" marR="63500" marL="63500" anchor="ctr">
                     <a:lnL cap="flat" cmpd="sng" w="19050">
                       <a:solidFill>
-                        <a:srgbClr val="F0D9B5"/>
+                        <a:srgbClr val="E5DDD0"/>
                       </a:solidFill>
                       <a:prstDash val="solid"/>
                       <a:round/>
@@ -7796,7 +7890,7 @@
                     </a:lnL>
                     <a:lnR cap="flat" cmpd="sng" w="19050">
                       <a:solidFill>
-                        <a:srgbClr val="F0D9B5"/>
+                        <a:srgbClr val="E5DDD0"/>
                       </a:solidFill>
                       <a:prstDash val="solid"/>
                       <a:round/>
@@ -7867,7 +7961,7 @@
                   <a:tcPr marT="0" marB="0" marR="63500" marL="63500" anchor="ctr">
                     <a:lnL cap="flat" cmpd="sng" w="19050">
                       <a:solidFill>
-                        <a:srgbClr val="F0D9B5"/>
+                        <a:srgbClr val="E5DDD0"/>
                       </a:solidFill>
                       <a:prstDash val="solid"/>
                       <a:round/>
@@ -7876,7 +7970,7 @@
                     </a:lnL>
                     <a:lnR cap="flat" cmpd="sng" w="19050">
                       <a:solidFill>
-                        <a:srgbClr val="F0D9B5"/>
+                        <a:srgbClr val="E5DDD0"/>
                       </a:solidFill>
                       <a:prstDash val="solid"/>
                       <a:round/>
@@ -7947,7 +8041,7 @@
                   <a:tcPr marT="0" marB="0" marR="63500" marL="63500" anchor="ctr">
                     <a:lnL cap="flat" cmpd="sng" w="19050">
                       <a:solidFill>
-                        <a:srgbClr val="F0D9B5"/>
+                        <a:srgbClr val="E5DDD0"/>
                       </a:solidFill>
                       <a:prstDash val="solid"/>
                       <a:round/>
@@ -7956,7 +8050,7 @@
                     </a:lnL>
                     <a:lnR cap="flat" cmpd="sng" w="19050">
                       <a:solidFill>
-                        <a:srgbClr val="F0D9B5"/>
+                        <a:srgbClr val="E5DDD0"/>
                       </a:solidFill>
                       <a:prstDash val="solid"/>
                       <a:round/>
@@ -8027,7 +8121,7 @@
                   <a:tcPr marT="0" marB="0" marR="63500" marL="63500" anchor="ctr">
                     <a:lnL cap="flat" cmpd="sng" w="19050">
                       <a:solidFill>
-                        <a:srgbClr val="F0D9B5"/>
+                        <a:srgbClr val="E5DDD0"/>
                       </a:solidFill>
                       <a:prstDash val="solid"/>
                       <a:round/>
@@ -8036,7 +8130,7 @@
                     </a:lnL>
                     <a:lnR cap="flat" cmpd="sng" w="19050">
                       <a:solidFill>
-                        <a:srgbClr val="F0D9B5"/>
+                        <a:srgbClr val="E5DDD0"/>
                       </a:solidFill>
                       <a:prstDash val="solid"/>
                       <a:round/>
@@ -8107,7 +8201,7 @@
                   <a:tcPr marT="0" marB="0" marR="63500" marL="63500" anchor="ctr">
                     <a:lnL cap="flat" cmpd="sng" w="19050">
                       <a:solidFill>
-                        <a:srgbClr val="F0D9B5"/>
+                        <a:srgbClr val="E5DDD0"/>
                       </a:solidFill>
                       <a:prstDash val="solid"/>
                       <a:round/>
@@ -8116,7 +8210,7 @@
                     </a:lnL>
                     <a:lnR cap="flat" cmpd="sng" w="19050">
                       <a:solidFill>
-                        <a:srgbClr val="F0D9B5"/>
+                        <a:srgbClr val="E5DDD0"/>
                       </a:solidFill>
                       <a:prstDash val="solid"/>
                       <a:round/>
@@ -8187,7 +8281,7 @@
                   <a:tcPr marT="0" marB="0" marR="63500" marL="63500" anchor="ctr">
                     <a:lnL cap="flat" cmpd="sng" w="19050">
                       <a:solidFill>
-                        <a:srgbClr val="F0D9B5"/>
+                        <a:srgbClr val="E5DDD0"/>
                       </a:solidFill>
                       <a:prstDash val="solid"/>
                       <a:round/>
@@ -8196,7 +8290,7 @@
                     </a:lnL>
                     <a:lnR cap="flat" cmpd="sng" w="19050">
                       <a:solidFill>
-                        <a:srgbClr val="F0D9B5"/>
+                        <a:srgbClr val="E5DDD0"/>
                       </a:solidFill>
                       <a:prstDash val="solid"/>
                       <a:round/>
@@ -8267,7 +8361,7 @@
                   <a:tcPr marT="0" marB="0" marR="63500" marL="63500" anchor="ctr">
                     <a:lnL cap="flat" cmpd="sng" w="19050">
                       <a:solidFill>
-                        <a:srgbClr val="F0D9B5"/>
+                        <a:srgbClr val="E5DDD0"/>
                       </a:solidFill>
                       <a:prstDash val="solid"/>
                       <a:round/>
@@ -8276,7 +8370,7 @@
                     </a:lnL>
                     <a:lnR cap="flat" cmpd="sng" w="19050">
                       <a:solidFill>
-                        <a:srgbClr val="F0D9B5"/>
+                        <a:srgbClr val="E5DDD0"/>
                       </a:solidFill>
                       <a:prstDash val="solid"/>
                       <a:round/>
@@ -8347,7 +8441,7 @@
                   <a:tcPr marT="0" marB="0" marR="63500" marL="63500" anchor="ctr">
                     <a:lnL cap="flat" cmpd="sng" w="19050">
                       <a:solidFill>
-                        <a:srgbClr val="F0D9B5"/>
+                        <a:srgbClr val="E5DDD0"/>
                       </a:solidFill>
                       <a:prstDash val="solid"/>
                       <a:round/>
@@ -8356,7 +8450,7 @@
                     </a:lnL>
                     <a:lnR cap="flat" cmpd="sng" w="19050">
                       <a:solidFill>
-                        <a:srgbClr val="F0D9B5"/>
+                        <a:srgbClr val="E5DDD0"/>
                       </a:solidFill>
                       <a:prstDash val="solid"/>
                       <a:round/>
@@ -8427,7 +8521,7 @@
                   <a:tcPr marT="0" marB="0" marR="63500" marL="63500" anchor="ctr">
                     <a:lnL cap="flat" cmpd="sng" w="19050">
                       <a:solidFill>
-                        <a:srgbClr val="F0D9B5"/>
+                        <a:srgbClr val="E5DDD0"/>
                       </a:solidFill>
                       <a:prstDash val="solid"/>
                       <a:round/>
@@ -8436,7 +8530,7 @@
                     </a:lnL>
                     <a:lnR cap="flat" cmpd="sng" w="19050">
                       <a:solidFill>
-                        <a:srgbClr val="F0D9B5"/>
+                        <a:srgbClr val="E5DDD0"/>
                       </a:solidFill>
                       <a:prstDash val="solid"/>
                       <a:round/>
@@ -10588,7 +10682,7 @@
                 </a:solidFill>
                 <a:ln w="9525">
                   <a:solidFill>
-                    <a:srgbClr val="F0D9B5"/>
+                    <a:srgbClr val="E5DDD0"/>
                   </a:solidFill>
                 </a:ln>
                 <a:effectLst>
@@ -10968,7 +11062,7 @@
                 </a:solidFill>
                 <a:ln w="9525">
                   <a:solidFill>
-                    <a:srgbClr val="F0D9B5"/>
+                    <a:srgbClr val="E5DDD0"/>
                   </a:solidFill>
                 </a:ln>
                 <a:effectLst>
@@ -11348,7 +11442,7 @@
                 </a:solidFill>
                 <a:ln w="9525">
                   <a:solidFill>
-                    <a:srgbClr val="F0D9B5"/>
+                    <a:srgbClr val="E5DDD0"/>
                   </a:solidFill>
                 </a:ln>
                 <a:effectLst>
@@ -11755,7 +11849,7 @@
                 </a:solidFill>
                 <a:ln w="9525">
                   <a:solidFill>
-                    <a:srgbClr val="F0D9B5"/>
+                    <a:srgbClr val="E5DDD0"/>
                   </a:solidFill>
                 </a:ln>
                 <a:effectLst>
@@ -12135,7 +12229,7 @@
                 </a:solidFill>
                 <a:ln w="9525">
                   <a:solidFill>
-                    <a:srgbClr val="F0D9B5"/>
+                    <a:srgbClr val="E5DDD0"/>
                   </a:solidFill>
                 </a:ln>
                 <a:effectLst>
@@ -12515,7 +12609,7 @@
                 </a:solidFill>
                 <a:ln w="9525">
                   <a:solidFill>
-                    <a:srgbClr val="F0D9B5"/>
+                    <a:srgbClr val="E5DDD0"/>
                   </a:solidFill>
                 </a:ln>
                 <a:effectLst>
@@ -12922,7 +13016,7 @@
                 </a:solidFill>
                 <a:ln w="9525">
                   <a:solidFill>
-                    <a:srgbClr val="F0D9B5"/>
+                    <a:srgbClr val="E5DDD0"/>
                   </a:solidFill>
                 </a:ln>
                 <a:effectLst>
@@ -13302,7 +13396,7 @@
                 </a:solidFill>
                 <a:ln w="9525">
                   <a:solidFill>
-                    <a:srgbClr val="F0D9B5"/>
+                    <a:srgbClr val="E5DDD0"/>
                   </a:solidFill>
                 </a:ln>
                 <a:effectLst>
@@ -13694,7 +13788,7 @@
                 </a:solidFill>
                 <a:ln w="9525">
                   <a:solidFill>
-                    <a:srgbClr val="F0D9B5"/>
+                    <a:srgbClr val="E5DDD0"/>
                   </a:solidFill>
                 </a:ln>
                 <a:effectLst>
@@ -14089,7 +14183,7 @@
                 </a:solidFill>
                 <a:ln w="9525">
                   <a:solidFill>
-                    <a:srgbClr val="F0D9B5"/>
+                    <a:srgbClr val="E5DDD0"/>
                   </a:solidFill>
                 </a:ln>
                 <a:effectLst>
@@ -14481,7 +14575,7 @@
                 </a:solidFill>
                 <a:ln w="9525">
                   <a:solidFill>
-                    <a:srgbClr val="F0D9B5"/>
+                    <a:srgbClr val="E5DDD0"/>
                   </a:solidFill>
                 </a:ln>
                 <a:effectLst>
@@ -14873,7 +14967,7 @@
                 </a:solidFill>
                 <a:ln w="9525">
                   <a:solidFill>
-                    <a:srgbClr val="F0D9B5"/>
+                    <a:srgbClr val="E5DDD0"/>
                   </a:solidFill>
                 </a:ln>
                 <a:effectLst>
@@ -15539,7 +15633,7 @@
         <a:srgbClr val="FFFFFF"/>
       </a:accent5>
       <a:accent6>
-        <a:srgbClr val="FDF6EC"/>
+        <a:srgbClr val="FAF8F5"/>
       </a:accent6>
       <a:hlink>
         <a:srgbClr val="0563C1"/>
